--- a/simulationto data.pptx
+++ b/simulationto data.pptx
@@ -104,6 +104,11 @@
       </a:defRPr>
     </a:lvl9pPr>
   </p:defaultTextStyle>
+  <p:extLst>
+    <p:ext uri="{EFAFB233-063F-42B5-8137-9DF3F51BA10A}">
+      <p15:sldGuideLst xmlns:p15="http://schemas.microsoft.com/office/powerpoint/2012/main"/>
+    </p:ext>
+  </p:extLst>
 </p:presentation>
 </file>
 
@@ -256,7 +261,7 @@
           <a:p>
             <a:fld id="{1D5000CB-4395-4768-85D1-DB37680BBF1C}" type="datetimeFigureOut">
               <a:rPr lang="zh-CN" altLang="en-US" smtClean="0"/>
-              <a:t>2025/3/13</a:t>
+              <a:t>2025/5/7</a:t>
             </a:fld>
             <a:endParaRPr lang="zh-CN" altLang="en-US"/>
           </a:p>
@@ -488,7 +493,7 @@
           <a:p>
             <a:fld id="{1D5000CB-4395-4768-85D1-DB37680BBF1C}" type="datetimeFigureOut">
               <a:rPr lang="zh-CN" altLang="en-US" smtClean="0"/>
-              <a:t>2025/3/13</a:t>
+              <a:t>2025/5/7</a:t>
             </a:fld>
             <a:endParaRPr lang="zh-CN" altLang="en-US"/>
           </a:p>
@@ -730,7 +735,7 @@
           <a:p>
             <a:fld id="{1D5000CB-4395-4768-85D1-DB37680BBF1C}" type="datetimeFigureOut">
               <a:rPr lang="zh-CN" altLang="en-US" smtClean="0"/>
-              <a:t>2025/3/13</a:t>
+              <a:t>2025/5/7</a:t>
             </a:fld>
             <a:endParaRPr lang="zh-CN" altLang="en-US"/>
           </a:p>
@@ -962,7 +967,7 @@
           <a:p>
             <a:fld id="{1D5000CB-4395-4768-85D1-DB37680BBF1C}" type="datetimeFigureOut">
               <a:rPr lang="zh-CN" altLang="en-US" smtClean="0"/>
-              <a:t>2025/3/13</a:t>
+              <a:t>2025/5/7</a:t>
             </a:fld>
             <a:endParaRPr lang="zh-CN" altLang="en-US"/>
           </a:p>
@@ -1238,7 +1243,7 @@
           <a:p>
             <a:fld id="{1D5000CB-4395-4768-85D1-DB37680BBF1C}" type="datetimeFigureOut">
               <a:rPr lang="zh-CN" altLang="en-US" smtClean="0"/>
-              <a:t>2025/3/13</a:t>
+              <a:t>2025/5/7</a:t>
             </a:fld>
             <a:endParaRPr lang="zh-CN" altLang="en-US"/>
           </a:p>
@@ -1570,7 +1575,7 @@
           <a:p>
             <a:fld id="{1D5000CB-4395-4768-85D1-DB37680BBF1C}" type="datetimeFigureOut">
               <a:rPr lang="zh-CN" altLang="en-US" smtClean="0"/>
-              <a:t>2025/3/13</a:t>
+              <a:t>2025/5/7</a:t>
             </a:fld>
             <a:endParaRPr lang="zh-CN" altLang="en-US"/>
           </a:p>
@@ -2049,7 +2054,7 @@
           <a:p>
             <a:fld id="{1D5000CB-4395-4768-85D1-DB37680BBF1C}" type="datetimeFigureOut">
               <a:rPr lang="zh-CN" altLang="en-US" smtClean="0"/>
-              <a:t>2025/3/13</a:t>
+              <a:t>2025/5/7</a:t>
             </a:fld>
             <a:endParaRPr lang="zh-CN" altLang="en-US"/>
           </a:p>
@@ -2191,7 +2196,7 @@
           <a:p>
             <a:fld id="{1D5000CB-4395-4768-85D1-DB37680BBF1C}" type="datetimeFigureOut">
               <a:rPr lang="zh-CN" altLang="en-US" smtClean="0"/>
-              <a:t>2025/3/13</a:t>
+              <a:t>2025/5/7</a:t>
             </a:fld>
             <a:endParaRPr lang="zh-CN" altLang="en-US"/>
           </a:p>
@@ -2304,7 +2309,7 @@
           <a:p>
             <a:fld id="{1D5000CB-4395-4768-85D1-DB37680BBF1C}" type="datetimeFigureOut">
               <a:rPr lang="zh-CN" altLang="en-US" smtClean="0"/>
-              <a:t>2025/3/13</a:t>
+              <a:t>2025/5/7</a:t>
             </a:fld>
             <a:endParaRPr lang="zh-CN" altLang="en-US"/>
           </a:p>
@@ -2649,7 +2654,7 @@
           <a:p>
             <a:fld id="{1D5000CB-4395-4768-85D1-DB37680BBF1C}" type="datetimeFigureOut">
               <a:rPr lang="zh-CN" altLang="en-US" smtClean="0"/>
-              <a:t>2025/3/13</a:t>
+              <a:t>2025/5/7</a:t>
             </a:fld>
             <a:endParaRPr lang="zh-CN" altLang="en-US"/>
           </a:p>
@@ -2938,7 +2943,7 @@
           <a:p>
             <a:fld id="{1D5000CB-4395-4768-85D1-DB37680BBF1C}" type="datetimeFigureOut">
               <a:rPr lang="zh-CN" altLang="en-US" smtClean="0"/>
-              <a:t>2025/3/13</a:t>
+              <a:t>2025/5/7</a:t>
             </a:fld>
             <a:endParaRPr lang="zh-CN" altLang="en-US"/>
           </a:p>
@@ -3213,7 +3218,7 @@
           <a:p>
             <a:fld id="{1D5000CB-4395-4768-85D1-DB37680BBF1C}" type="datetimeFigureOut">
               <a:rPr lang="zh-CN" altLang="en-US" smtClean="0"/>
-              <a:t>2025/3/13</a:t>
+              <a:t>2025/5/7</a:t>
             </a:fld>
             <a:endParaRPr lang="zh-CN" altLang="en-US"/>
           </a:p>
@@ -3645,7 +3650,7 @@
         <p:spPr>
           <a:xfrm>
             <a:off x="433633" y="443059"/>
-            <a:ext cx="2571538" cy="369332"/>
+            <a:ext cx="1107996" cy="369332"/>
           </a:xfrm>
           <a:prstGeom prst="rect">
             <a:avLst/>
@@ -3658,14 +3663,6 @@
           </a:bodyPr>
           <a:lstStyle/>
           <a:p>
-            <a:r>
-              <a:rPr lang="zh-CN" altLang="en-US" dirty="0"/>
-              <a:t>卡哦哦平，</a:t>
-            </a:r>
-            <a:r>
-              <a:rPr lang="en-US" altLang="zh-CN" dirty="0"/>
-              <a:t>am</a:t>
-            </a:r>
             <a:r>
               <a:rPr lang="ja-JP" altLang="en-US" dirty="0"/>
               <a:t>原理説明</a:t>
